--- a/slides/02-4-ClosestPair.pptx
+++ b/slides/02-4-ClosestPair.pptx
@@ -218,7 +218,7 @@
           <a:p>
             <a:fld id="{C5B45307-6ED4-B142-BD64-10F739779302}" type="datetimeFigureOut">
               <a:rPr lang="en-US" smtClean="0"/>
-              <a:t>9/30/25</a:t>
+              <a:t>2/10/26</a:t>
             </a:fld>
             <a:endParaRPr lang="en-US"/>
           </a:p>
@@ -631,7 +631,7 @@
           <a:noFill/>
           <a:extLst>
             <a:ext uri="{909E8E84-426E-40dd-AFC4-6F175D3DCCD1}">
-              <a14:hiddenFill xmlns:a14="http://schemas.microsoft.com/office/drawing/2010/main" xmlns="">
+              <a14:hiddenFill xmlns="" xmlns:a14="http://schemas.microsoft.com/office/drawing/2010/main">
                 <a:solidFill>
                   <a:srgbClr val="FFFFFF"/>
                 </a:solidFill>
@@ -690,7 +690,7 @@
             </a:ln>
             <a:extLst>
               <a:ext uri="{91240B29-F687-4f45-9708-019B960494DF}">
-                <a14:hiddenLine xmlns:a14="http://schemas.microsoft.com/office/drawing/2010/main" xmlns="" w="9525">
+                <a14:hiddenLine xmlns="" xmlns:a14="http://schemas.microsoft.com/office/drawing/2010/main" w="9525">
                   <a:solidFill>
                     <a:srgbClr val="000000"/>
                   </a:solidFill>
@@ -780,7 +780,7 @@
             </a:ln>
             <a:extLst>
               <a:ext uri="{91240B29-F687-4f45-9708-019B960494DF}">
-                <a14:hiddenLine xmlns:a14="http://schemas.microsoft.com/office/drawing/2010/main" xmlns="" w="9525">
+                <a14:hiddenLine xmlns="" xmlns:a14="http://schemas.microsoft.com/office/drawing/2010/main" w="9525">
                   <a:solidFill>
                     <a:srgbClr val="000000"/>
                   </a:solidFill>
@@ -870,7 +870,7 @@
             </a:ln>
             <a:extLst>
               <a:ext uri="{91240B29-F687-4f45-9708-019B960494DF}">
-                <a14:hiddenLine xmlns:a14="http://schemas.microsoft.com/office/drawing/2010/main" xmlns="" w="9525">
+                <a14:hiddenLine xmlns="" xmlns:a14="http://schemas.microsoft.com/office/drawing/2010/main" w="9525">
                   <a:solidFill>
                     <a:srgbClr val="000000"/>
                   </a:solidFill>
@@ -904,7 +904,7 @@
             </a:ln>
             <a:extLst>
               <a:ext uri="{91240B29-F687-4f45-9708-019B960494DF}">
-                <a14:hiddenLine xmlns:a14="http://schemas.microsoft.com/office/drawing/2010/main" xmlns="" w="9525">
+                <a14:hiddenLine xmlns="" xmlns:a14="http://schemas.microsoft.com/office/drawing/2010/main" w="9525">
                   <a:solidFill>
                     <a:srgbClr val="000000"/>
                   </a:solidFill>
@@ -994,7 +994,7 @@
             </a:ln>
             <a:extLst>
               <a:ext uri="{91240B29-F687-4f45-9708-019B960494DF}">
-                <a14:hiddenLine xmlns:a14="http://schemas.microsoft.com/office/drawing/2010/main" xmlns="" w="9525">
+                <a14:hiddenLine xmlns="" xmlns:a14="http://schemas.microsoft.com/office/drawing/2010/main" w="9525">
                   <a:solidFill>
                     <a:srgbClr val="000000"/>
                   </a:solidFill>
@@ -1056,7 +1056,7 @@
             </a:ln>
             <a:extLst>
               <a:ext uri="{91240B29-F687-4f45-9708-019B960494DF}">
-                <a14:hiddenLine xmlns:a14="http://schemas.microsoft.com/office/drawing/2010/main" xmlns="" w="9525">
+                <a14:hiddenLine xmlns="" xmlns:a14="http://schemas.microsoft.com/office/drawing/2010/main" w="9525">
                   <a:solidFill>
                     <a:srgbClr val="000000"/>
                   </a:solidFill>
@@ -1118,7 +1118,7 @@
             </a:ln>
             <a:extLst>
               <a:ext uri="{91240B29-F687-4f45-9708-019B960494DF}">
-                <a14:hiddenLine xmlns:a14="http://schemas.microsoft.com/office/drawing/2010/main" xmlns="" w="9525">
+                <a14:hiddenLine xmlns="" xmlns:a14="http://schemas.microsoft.com/office/drawing/2010/main" w="9525">
                   <a:solidFill>
                     <a:srgbClr val="000000"/>
                   </a:solidFill>
@@ -1208,7 +1208,7 @@
             </a:ln>
             <a:extLst>
               <a:ext uri="{91240B29-F687-4f45-9708-019B960494DF}">
-                <a14:hiddenLine xmlns:a14="http://schemas.microsoft.com/office/drawing/2010/main" xmlns="" w="9525">
+                <a14:hiddenLine xmlns="" xmlns:a14="http://schemas.microsoft.com/office/drawing/2010/main" w="9525">
                   <a:solidFill>
                     <a:srgbClr val="000000"/>
                   </a:solidFill>
@@ -1270,7 +1270,7 @@
             </a:ln>
             <a:extLst>
               <a:ext uri="{91240B29-F687-4f45-9708-019B960494DF}">
-                <a14:hiddenLine xmlns:a14="http://schemas.microsoft.com/office/drawing/2010/main" xmlns="" w="9525">
+                <a14:hiddenLine xmlns="" xmlns:a14="http://schemas.microsoft.com/office/drawing/2010/main" w="9525">
                   <a:solidFill>
                     <a:srgbClr val="000000"/>
                   </a:solidFill>
@@ -1332,7 +1332,7 @@
             </a:ln>
             <a:extLst>
               <a:ext uri="{91240B29-F687-4f45-9708-019B960494DF}">
-                <a14:hiddenLine xmlns:a14="http://schemas.microsoft.com/office/drawing/2010/main" xmlns="" w="9525">
+                <a14:hiddenLine xmlns="" xmlns:a14="http://schemas.microsoft.com/office/drawing/2010/main" w="9525">
                   <a:solidFill>
                     <a:srgbClr val="000000"/>
                   </a:solidFill>
@@ -1422,7 +1422,7 @@
             </a:ln>
             <a:extLst>
               <a:ext uri="{91240B29-F687-4f45-9708-019B960494DF}">
-                <a14:hiddenLine xmlns:a14="http://schemas.microsoft.com/office/drawing/2010/main" xmlns="" w="9525">
+                <a14:hiddenLine xmlns="" xmlns:a14="http://schemas.microsoft.com/office/drawing/2010/main" w="9525">
                   <a:solidFill>
                     <a:srgbClr val="000000"/>
                   </a:solidFill>
@@ -1512,7 +1512,7 @@
             </a:ln>
             <a:extLst>
               <a:ext uri="{91240B29-F687-4f45-9708-019B960494DF}">
-                <a14:hiddenLine xmlns:a14="http://schemas.microsoft.com/office/drawing/2010/main" xmlns="" w="9525">
+                <a14:hiddenLine xmlns="" xmlns:a14="http://schemas.microsoft.com/office/drawing/2010/main" w="9525">
                   <a:solidFill>
                     <a:srgbClr val="000000"/>
                   </a:solidFill>
@@ -1574,7 +1574,7 @@
             </a:ln>
             <a:extLst>
               <a:ext uri="{91240B29-F687-4f45-9708-019B960494DF}">
-                <a14:hiddenLine xmlns:a14="http://schemas.microsoft.com/office/drawing/2010/main" xmlns="" w="9525">
+                <a14:hiddenLine xmlns="" xmlns:a14="http://schemas.microsoft.com/office/drawing/2010/main" w="9525">
                   <a:solidFill>
                     <a:srgbClr val="000000"/>
                   </a:solidFill>
@@ -1684,7 +1684,7 @@
             </a:ln>
             <a:extLst>
               <a:ext uri="{91240B29-F687-4f45-9708-019B960494DF}">
-                <a14:hiddenLine xmlns:a14="http://schemas.microsoft.com/office/drawing/2010/main" xmlns="" w="9525">
+                <a14:hiddenLine xmlns="" xmlns:a14="http://schemas.microsoft.com/office/drawing/2010/main" w="9525">
                   <a:solidFill>
                     <a:srgbClr val="000000"/>
                   </a:solidFill>
@@ -1746,7 +1746,7 @@
             </a:ln>
             <a:extLst>
               <a:ext uri="{91240B29-F687-4f45-9708-019B960494DF}">
-                <a14:hiddenLine xmlns:a14="http://schemas.microsoft.com/office/drawing/2010/main" xmlns="" w="9525">
+                <a14:hiddenLine xmlns="" xmlns:a14="http://schemas.microsoft.com/office/drawing/2010/main" w="9525">
                   <a:solidFill>
                     <a:srgbClr val="000000"/>
                   </a:solidFill>
@@ -1836,7 +1836,7 @@
             </a:ln>
             <a:extLst>
               <a:ext uri="{91240B29-F687-4f45-9708-019B960494DF}">
-                <a14:hiddenLine xmlns:a14="http://schemas.microsoft.com/office/drawing/2010/main" xmlns="" w="9525">
+                <a14:hiddenLine xmlns="" xmlns:a14="http://schemas.microsoft.com/office/drawing/2010/main" w="9525">
                   <a:solidFill>
                     <a:srgbClr val="000000"/>
                   </a:solidFill>
@@ -1926,7 +1926,7 @@
             </a:ln>
             <a:extLst>
               <a:ext uri="{91240B29-F687-4f45-9708-019B960494DF}">
-                <a14:hiddenLine xmlns:a14="http://schemas.microsoft.com/office/drawing/2010/main" xmlns="" w="9525">
+                <a14:hiddenLine xmlns="" xmlns:a14="http://schemas.microsoft.com/office/drawing/2010/main" w="9525">
                   <a:solidFill>
                     <a:srgbClr val="000000"/>
                   </a:solidFill>
@@ -1988,7 +1988,7 @@
             </a:ln>
             <a:extLst>
               <a:ext uri="{91240B29-F687-4f45-9708-019B960494DF}">
-                <a14:hiddenLine xmlns:a14="http://schemas.microsoft.com/office/drawing/2010/main" xmlns="" w="9525">
+                <a14:hiddenLine xmlns="" xmlns:a14="http://schemas.microsoft.com/office/drawing/2010/main" w="9525">
                   <a:solidFill>
                     <a:srgbClr val="000000"/>
                   </a:solidFill>
@@ -2078,7 +2078,7 @@
             </a:ln>
             <a:extLst>
               <a:ext uri="{91240B29-F687-4f45-9708-019B960494DF}">
-                <a14:hiddenLine xmlns:a14="http://schemas.microsoft.com/office/drawing/2010/main" xmlns="" w="9525">
+                <a14:hiddenLine xmlns="" xmlns:a14="http://schemas.microsoft.com/office/drawing/2010/main" w="9525">
                   <a:solidFill>
                     <a:srgbClr val="000000"/>
                   </a:solidFill>
@@ -2168,7 +2168,7 @@
             </a:ln>
             <a:extLst>
               <a:ext uri="{91240B29-F687-4f45-9708-019B960494DF}">
-                <a14:hiddenLine xmlns:a14="http://schemas.microsoft.com/office/drawing/2010/main" xmlns="" w="9525">
+                <a14:hiddenLine xmlns="" xmlns:a14="http://schemas.microsoft.com/office/drawing/2010/main" w="9525">
                   <a:solidFill>
                     <a:srgbClr val="000000"/>
                   </a:solidFill>
@@ -2224,7 +2224,7 @@
             </a:ln>
             <a:extLst>
               <a:ext uri="{91240B29-F687-4f45-9708-019B960494DF}">
-                <a14:hiddenLine xmlns:a14="http://schemas.microsoft.com/office/drawing/2010/main" xmlns="" w="9525">
+                <a14:hiddenLine xmlns="" xmlns:a14="http://schemas.microsoft.com/office/drawing/2010/main" w="9525">
                   <a:solidFill>
                     <a:srgbClr val="000000"/>
                   </a:solidFill>
@@ -2314,7 +2314,7 @@
             </a:ln>
             <a:extLst>
               <a:ext uri="{91240B29-F687-4f45-9708-019B960494DF}">
-                <a14:hiddenLine xmlns:a14="http://schemas.microsoft.com/office/drawing/2010/main" xmlns="" w="9525">
+                <a14:hiddenLine xmlns="" xmlns:a14="http://schemas.microsoft.com/office/drawing/2010/main" w="9525">
                   <a:solidFill>
                     <a:srgbClr val="000000"/>
                   </a:solidFill>
@@ -2370,7 +2370,7 @@
             </a:ln>
             <a:extLst>
               <a:ext uri="{91240B29-F687-4f45-9708-019B960494DF}">
-                <a14:hiddenLine xmlns:a14="http://schemas.microsoft.com/office/drawing/2010/main" xmlns="" w="9525">
+                <a14:hiddenLine xmlns="" xmlns:a14="http://schemas.microsoft.com/office/drawing/2010/main" w="9525">
                   <a:solidFill>
                     <a:srgbClr val="000000"/>
                   </a:solidFill>
@@ -2460,7 +2460,7 @@
             </a:ln>
             <a:extLst>
               <a:ext uri="{91240B29-F687-4f45-9708-019B960494DF}">
-                <a14:hiddenLine xmlns:a14="http://schemas.microsoft.com/office/drawing/2010/main" xmlns="" w="9525">
+                <a14:hiddenLine xmlns="" xmlns:a14="http://schemas.microsoft.com/office/drawing/2010/main" w="9525">
                   <a:solidFill>
                     <a:srgbClr val="000000"/>
                   </a:solidFill>
@@ -2528,7 +2528,7 @@
             </a:ln>
             <a:extLst>
               <a:ext uri="{91240B29-F687-4f45-9708-019B960494DF}">
-                <a14:hiddenLine xmlns:a14="http://schemas.microsoft.com/office/drawing/2010/main" xmlns="" w="9525">
+                <a14:hiddenLine xmlns="" xmlns:a14="http://schemas.microsoft.com/office/drawing/2010/main" w="9525">
                   <a:solidFill>
                     <a:srgbClr val="000000"/>
                   </a:solidFill>
@@ -2618,7 +2618,7 @@
             </a:ln>
             <a:extLst>
               <a:ext uri="{91240B29-F687-4f45-9708-019B960494DF}">
-                <a14:hiddenLine xmlns:a14="http://schemas.microsoft.com/office/drawing/2010/main" xmlns="" w="9525">
+                <a14:hiddenLine xmlns="" xmlns:a14="http://schemas.microsoft.com/office/drawing/2010/main" w="9525">
                   <a:solidFill>
                     <a:srgbClr val="000000"/>
                   </a:solidFill>
@@ -2686,7 +2686,7 @@
             </a:ln>
             <a:extLst>
               <a:ext uri="{91240B29-F687-4f45-9708-019B960494DF}">
-                <a14:hiddenLine xmlns:a14="http://schemas.microsoft.com/office/drawing/2010/main" xmlns="" w="9525">
+                <a14:hiddenLine xmlns="" xmlns:a14="http://schemas.microsoft.com/office/drawing/2010/main" w="9525">
                   <a:solidFill>
                     <a:srgbClr val="000000"/>
                   </a:solidFill>
@@ -2776,7 +2776,7 @@
             </a:ln>
             <a:extLst>
               <a:ext uri="{91240B29-F687-4f45-9708-019B960494DF}">
-                <a14:hiddenLine xmlns:a14="http://schemas.microsoft.com/office/drawing/2010/main" xmlns="" w="9525">
+                <a14:hiddenLine xmlns="" xmlns:a14="http://schemas.microsoft.com/office/drawing/2010/main" w="9525">
                   <a:solidFill>
                     <a:srgbClr val="000000"/>
                   </a:solidFill>
@@ -2810,7 +2810,7 @@
             </a:ln>
             <a:extLst>
               <a:ext uri="{91240B29-F687-4f45-9708-019B960494DF}">
-                <a14:hiddenLine xmlns:a14="http://schemas.microsoft.com/office/drawing/2010/main" xmlns="" w="9525">
+                <a14:hiddenLine xmlns="" xmlns:a14="http://schemas.microsoft.com/office/drawing/2010/main" w="9525">
                   <a:solidFill>
                     <a:srgbClr val="000000"/>
                   </a:solidFill>
@@ -2900,7 +2900,7 @@
             </a:ln>
             <a:extLst>
               <a:ext uri="{91240B29-F687-4f45-9708-019B960494DF}">
-                <a14:hiddenLine xmlns:a14="http://schemas.microsoft.com/office/drawing/2010/main" xmlns="" w="9525">
+                <a14:hiddenLine xmlns="" xmlns:a14="http://schemas.microsoft.com/office/drawing/2010/main" w="9525">
                   <a:solidFill>
                     <a:srgbClr val="000000"/>
                   </a:solidFill>
@@ -2962,7 +2962,7 @@
             </a:ln>
             <a:extLst>
               <a:ext uri="{91240B29-F687-4f45-9708-019B960494DF}">
-                <a14:hiddenLine xmlns:a14="http://schemas.microsoft.com/office/drawing/2010/main" xmlns="" w="9525">
+                <a14:hiddenLine xmlns="" xmlns:a14="http://schemas.microsoft.com/office/drawing/2010/main" w="9525">
                   <a:solidFill>
                     <a:srgbClr val="000000"/>
                   </a:solidFill>
@@ -3024,7 +3024,7 @@
             </a:ln>
             <a:extLst>
               <a:ext uri="{91240B29-F687-4f45-9708-019B960494DF}">
-                <a14:hiddenLine xmlns:a14="http://schemas.microsoft.com/office/drawing/2010/main" xmlns="" w="9525">
+                <a14:hiddenLine xmlns="" xmlns:a14="http://schemas.microsoft.com/office/drawing/2010/main" w="9525">
                   <a:solidFill>
                     <a:srgbClr val="000000"/>
                   </a:solidFill>
@@ -3114,7 +3114,7 @@
             </a:ln>
             <a:extLst>
               <a:ext uri="{91240B29-F687-4f45-9708-019B960494DF}">
-                <a14:hiddenLine xmlns:a14="http://schemas.microsoft.com/office/drawing/2010/main" xmlns="" w="9525">
+                <a14:hiddenLine xmlns="" xmlns:a14="http://schemas.microsoft.com/office/drawing/2010/main" w="9525">
                   <a:solidFill>
                     <a:srgbClr val="000000"/>
                   </a:solidFill>
@@ -3182,7 +3182,7 @@
             </a:ln>
             <a:extLst>
               <a:ext uri="{91240B29-F687-4f45-9708-019B960494DF}">
-                <a14:hiddenLine xmlns:a14="http://schemas.microsoft.com/office/drawing/2010/main" xmlns="" w="9525">
+                <a14:hiddenLine xmlns="" xmlns:a14="http://schemas.microsoft.com/office/drawing/2010/main" w="9525">
                   <a:solidFill>
                     <a:srgbClr val="000000"/>
                   </a:solidFill>
@@ -3244,7 +3244,7 @@
             </a:ln>
             <a:extLst>
               <a:ext uri="{91240B29-F687-4f45-9708-019B960494DF}">
-                <a14:hiddenLine xmlns:a14="http://schemas.microsoft.com/office/drawing/2010/main" xmlns="" w="9525">
+                <a14:hiddenLine xmlns="" xmlns:a14="http://schemas.microsoft.com/office/drawing/2010/main" w="9525">
                   <a:solidFill>
                     <a:srgbClr val="000000"/>
                   </a:solidFill>
@@ -3334,7 +3334,7 @@
             </a:ln>
             <a:extLst>
               <a:ext uri="{91240B29-F687-4f45-9708-019B960494DF}">
-                <a14:hiddenLine xmlns:a14="http://schemas.microsoft.com/office/drawing/2010/main" xmlns="" w="9525">
+                <a14:hiddenLine xmlns="" xmlns:a14="http://schemas.microsoft.com/office/drawing/2010/main" w="9525">
                   <a:solidFill>
                     <a:srgbClr val="000000"/>
                   </a:solidFill>
@@ -3396,7 +3396,7 @@
             </a:ln>
             <a:extLst>
               <a:ext uri="{91240B29-F687-4f45-9708-019B960494DF}">
-                <a14:hiddenLine xmlns:a14="http://schemas.microsoft.com/office/drawing/2010/main" xmlns="" w="9525">
+                <a14:hiddenLine xmlns="" xmlns:a14="http://schemas.microsoft.com/office/drawing/2010/main" w="9525">
                   <a:solidFill>
                     <a:srgbClr val="000000"/>
                   </a:solidFill>
@@ -3486,7 +3486,7 @@
             </a:ln>
             <a:extLst>
               <a:ext uri="{91240B29-F687-4f45-9708-019B960494DF}">
-                <a14:hiddenLine xmlns:a14="http://schemas.microsoft.com/office/drawing/2010/main" xmlns="" w="9525">
+                <a14:hiddenLine xmlns="" xmlns:a14="http://schemas.microsoft.com/office/drawing/2010/main" w="9525">
                   <a:solidFill>
                     <a:srgbClr val="000000"/>
                   </a:solidFill>
@@ -3548,7 +3548,7 @@
             </a:ln>
             <a:extLst>
               <a:ext uri="{91240B29-F687-4f45-9708-019B960494DF}">
-                <a14:hiddenLine xmlns:a14="http://schemas.microsoft.com/office/drawing/2010/main" xmlns="" w="9525">
+                <a14:hiddenLine xmlns="" xmlns:a14="http://schemas.microsoft.com/office/drawing/2010/main" w="9525">
                   <a:solidFill>
                     <a:srgbClr val="000000"/>
                   </a:solidFill>
@@ -3638,7 +3638,7 @@
             </a:ln>
             <a:extLst>
               <a:ext uri="{91240B29-F687-4f45-9708-019B960494DF}">
-                <a14:hiddenLine xmlns:a14="http://schemas.microsoft.com/office/drawing/2010/main" xmlns="" w="9525">
+                <a14:hiddenLine xmlns="" xmlns:a14="http://schemas.microsoft.com/office/drawing/2010/main" w="9525">
                   <a:solidFill>
                     <a:srgbClr val="000000"/>
                   </a:solidFill>
@@ -3672,7 +3672,7 @@
             </a:ln>
             <a:extLst>
               <a:ext uri="{91240B29-F687-4f45-9708-019B960494DF}">
-                <a14:hiddenLine xmlns:a14="http://schemas.microsoft.com/office/drawing/2010/main" xmlns="" w="9525">
+                <a14:hiddenLine xmlns="" xmlns:a14="http://schemas.microsoft.com/office/drawing/2010/main" w="9525">
                   <a:solidFill>
                     <a:srgbClr val="000000"/>
                   </a:solidFill>
@@ -3737,7 +3737,7 @@
             </a:ln>
             <a:extLst>
               <a:ext uri="{91240B29-F687-4f45-9708-019B960494DF}">
-                <a14:hiddenLine xmlns:a14="http://schemas.microsoft.com/office/drawing/2010/main" xmlns="" w="9525">
+                <a14:hiddenLine xmlns="" xmlns:a14="http://schemas.microsoft.com/office/drawing/2010/main" w="9525">
                   <a:solidFill>
                     <a:srgbClr val="000000"/>
                   </a:solidFill>
@@ -3827,7 +3827,7 @@
             </a:ln>
             <a:extLst>
               <a:ext uri="{91240B29-F687-4f45-9708-019B960494DF}">
-                <a14:hiddenLine xmlns:a14="http://schemas.microsoft.com/office/drawing/2010/main" xmlns="" w="9525">
+                <a14:hiddenLine xmlns="" xmlns:a14="http://schemas.microsoft.com/office/drawing/2010/main" w="9525">
                   <a:solidFill>
                     <a:srgbClr val="000000"/>
                   </a:solidFill>
@@ -3889,7 +3889,7 @@
             </a:ln>
             <a:extLst>
               <a:ext uri="{91240B29-F687-4f45-9708-019B960494DF}">
-                <a14:hiddenLine xmlns:a14="http://schemas.microsoft.com/office/drawing/2010/main" xmlns="" w="9525">
+                <a14:hiddenLine xmlns="" xmlns:a14="http://schemas.microsoft.com/office/drawing/2010/main" w="9525">
                   <a:solidFill>
                     <a:srgbClr val="000000"/>
                   </a:solidFill>
@@ -3979,7 +3979,7 @@
             </a:ln>
             <a:extLst>
               <a:ext uri="{91240B29-F687-4f45-9708-019B960494DF}">
-                <a14:hiddenLine xmlns:a14="http://schemas.microsoft.com/office/drawing/2010/main" xmlns="" w="9525">
+                <a14:hiddenLine xmlns="" xmlns:a14="http://schemas.microsoft.com/office/drawing/2010/main" w="9525">
                   <a:solidFill>
                     <a:srgbClr val="000000"/>
                   </a:solidFill>
@@ -4069,7 +4069,7 @@
             </a:ln>
             <a:extLst>
               <a:ext uri="{91240B29-F687-4f45-9708-019B960494DF}">
-                <a14:hiddenLine xmlns:a14="http://schemas.microsoft.com/office/drawing/2010/main" xmlns="" w="9525">
+                <a14:hiddenLine xmlns="" xmlns:a14="http://schemas.microsoft.com/office/drawing/2010/main" w="9525">
                   <a:solidFill>
                     <a:srgbClr val="000000"/>
                   </a:solidFill>
@@ -4134,7 +4134,7 @@
             </a:ln>
             <a:extLst>
               <a:ext uri="{91240B29-F687-4f45-9708-019B960494DF}">
-                <a14:hiddenLine xmlns:a14="http://schemas.microsoft.com/office/drawing/2010/main" xmlns="" w="9525">
+                <a14:hiddenLine xmlns="" xmlns:a14="http://schemas.microsoft.com/office/drawing/2010/main" w="9525">
                   <a:solidFill>
                     <a:srgbClr val="000000"/>
                   </a:solidFill>
@@ -4196,7 +4196,7 @@
             </a:ln>
             <a:extLst>
               <a:ext uri="{91240B29-F687-4f45-9708-019B960494DF}">
-                <a14:hiddenLine xmlns:a14="http://schemas.microsoft.com/office/drawing/2010/main" xmlns="" w="9525">
+                <a14:hiddenLine xmlns="" xmlns:a14="http://schemas.microsoft.com/office/drawing/2010/main" w="9525">
                   <a:solidFill>
                     <a:srgbClr val="000000"/>
                   </a:solidFill>
@@ -4286,7 +4286,7 @@
             </a:ln>
             <a:extLst>
               <a:ext uri="{91240B29-F687-4f45-9708-019B960494DF}">
-                <a14:hiddenLine xmlns:a14="http://schemas.microsoft.com/office/drawing/2010/main" xmlns="" w="9525">
+                <a14:hiddenLine xmlns="" xmlns:a14="http://schemas.microsoft.com/office/drawing/2010/main" w="9525">
                   <a:solidFill>
                     <a:srgbClr val="000000"/>
                   </a:solidFill>
@@ -4376,7 +4376,7 @@
             </a:ln>
             <a:extLst>
               <a:ext uri="{91240B29-F687-4f45-9708-019B960494DF}">
-                <a14:hiddenLine xmlns:a14="http://schemas.microsoft.com/office/drawing/2010/main" xmlns="" w="9525">
+                <a14:hiddenLine xmlns="" xmlns:a14="http://schemas.microsoft.com/office/drawing/2010/main" w="9525">
                   <a:solidFill>
                     <a:srgbClr val="000000"/>
                   </a:solidFill>
@@ -4438,7 +4438,7 @@
             </a:ln>
             <a:extLst>
               <a:ext uri="{91240B29-F687-4f45-9708-019B960494DF}">
-                <a14:hiddenLine xmlns:a14="http://schemas.microsoft.com/office/drawing/2010/main" xmlns="" w="9525">
+                <a14:hiddenLine xmlns="" xmlns:a14="http://schemas.microsoft.com/office/drawing/2010/main" w="9525">
                   <a:solidFill>
                     <a:srgbClr val="000000"/>
                   </a:solidFill>
@@ -4558,7 +4558,7 @@
             </a:ln>
             <a:extLst>
               <a:ext uri="{91240B29-F687-4f45-9708-019B960494DF}">
-                <a14:hiddenLine xmlns:a14="http://schemas.microsoft.com/office/drawing/2010/main" xmlns="" w="9525">
+                <a14:hiddenLine xmlns="" xmlns:a14="http://schemas.microsoft.com/office/drawing/2010/main" w="9525">
                   <a:solidFill>
                     <a:srgbClr val="000000"/>
                   </a:solidFill>
@@ -4626,7 +4626,7 @@
             </a:ln>
             <a:extLst>
               <a:ext uri="{91240B29-F687-4f45-9708-019B960494DF}">
-                <a14:hiddenLine xmlns:a14="http://schemas.microsoft.com/office/drawing/2010/main" xmlns="" w="9525">
+                <a14:hiddenLine xmlns="" xmlns:a14="http://schemas.microsoft.com/office/drawing/2010/main" w="9525">
                   <a:solidFill>
                     <a:srgbClr val="000000"/>
                   </a:solidFill>
@@ -4716,7 +4716,7 @@
             </a:ln>
             <a:extLst>
               <a:ext uri="{91240B29-F687-4f45-9708-019B960494DF}">
-                <a14:hiddenLine xmlns:a14="http://schemas.microsoft.com/office/drawing/2010/main" xmlns="" w="9525">
+                <a14:hiddenLine xmlns="" xmlns:a14="http://schemas.microsoft.com/office/drawing/2010/main" w="9525">
                   <a:solidFill>
                     <a:srgbClr val="000000"/>
                   </a:solidFill>
@@ -4856,7 +4856,7 @@
           <a:p>
             <a:fld id="{A30FCFFE-258A-074E-8FD7-0EB0A569CBEB}" type="datetime1">
               <a:rPr lang="en-US" smtClean="0"/>
-              <a:t>9/30/25</a:t>
+              <a:t>2/10/26</a:t>
             </a:fld>
             <a:endParaRPr lang="en-US"/>
           </a:p>
@@ -5123,7 +5123,7 @@
           <a:p>
             <a:fld id="{F49E2033-71C3-AD43-A135-E0FE15DB5E6C}" type="datetime1">
               <a:rPr lang="en-US" smtClean="0"/>
-              <a:t>9/30/25</a:t>
+              <a:t>2/10/26</a:t>
             </a:fld>
             <a:endParaRPr lang="en-US"/>
           </a:p>
@@ -5319,7 +5319,7 @@
           <a:p>
             <a:fld id="{7609C976-CAEB-FC4E-9291-F73F8685F9B5}" type="datetime1">
               <a:rPr lang="en-US" smtClean="0"/>
-              <a:t>9/30/25</a:t>
+              <a:t>2/10/26</a:t>
             </a:fld>
             <a:endParaRPr lang="en-US"/>
           </a:p>
@@ -5582,7 +5582,7 @@
           <a:p>
             <a:fld id="{3EB9BAE5-B5BD-0E49-8C17-B398AC0E6F8C}" type="datetime1">
               <a:rPr lang="en-US" smtClean="0"/>
-              <a:t>9/30/25</a:t>
+              <a:t>2/10/26</a:t>
             </a:fld>
             <a:endParaRPr lang="en-US"/>
           </a:p>
@@ -6016,7 +6016,7 @@
           <a:p>
             <a:fld id="{A3BDB89A-D4A4-4847-9646-4167B2B7DAB8}" type="datetime1">
               <a:rPr lang="en-US" smtClean="0"/>
-              <a:t>9/30/25</a:t>
+              <a:t>2/10/26</a:t>
             </a:fld>
             <a:endParaRPr lang="en-US"/>
           </a:p>
@@ -6562,7 +6562,7 @@
           <a:p>
             <a:fld id="{DBF6442D-A3B6-104E-B2C4-04EBE5CD3A86}" type="datetime1">
               <a:rPr lang="en-US" smtClean="0"/>
-              <a:t>9/30/25</a:t>
+              <a:t>2/10/26</a:t>
             </a:fld>
             <a:endParaRPr lang="en-US"/>
           </a:p>
@@ -7282,7 +7282,7 @@
           <a:p>
             <a:fld id="{FAE5AE38-7C08-004A-B8D4-CB11E3A6B341}" type="datetime1">
               <a:rPr lang="en-US" smtClean="0"/>
-              <a:t>9/30/25</a:t>
+              <a:t>2/10/26</a:t>
             </a:fld>
             <a:endParaRPr lang="en-US"/>
           </a:p>
@@ -7452,7 +7452,7 @@
           <a:p>
             <a:fld id="{60AA854E-1A4F-4644-A48B-83D5FC13672A}" type="datetime1">
               <a:rPr lang="en-US" smtClean="0"/>
-              <a:t>9/30/25</a:t>
+              <a:t>2/10/26</a:t>
             </a:fld>
             <a:endParaRPr lang="en-US"/>
           </a:p>
@@ -7632,7 +7632,7 @@
           <a:p>
             <a:fld id="{A32AC11E-537A-914C-9D8D-A1F7EFEBB5B0}" type="datetime1">
               <a:rPr lang="en-US" smtClean="0"/>
-              <a:t>9/30/25</a:t>
+              <a:t>2/10/26</a:t>
             </a:fld>
             <a:endParaRPr lang="en-US"/>
           </a:p>
@@ -7802,7 +7802,7 @@
           <a:p>
             <a:fld id="{6CBA57BA-6648-0B48-99C7-D7621DA9BEA6}" type="datetime1">
               <a:rPr lang="en-US" smtClean="0"/>
-              <a:t>9/30/25</a:t>
+              <a:t>2/10/26</a:t>
             </a:fld>
             <a:endParaRPr lang="en-US"/>
           </a:p>
@@ -8052,7 +8052,7 @@
           <a:p>
             <a:fld id="{3D59ABFE-FAFA-9F41-AC00-13260AA0DB6E}" type="datetime1">
               <a:rPr lang="en-US" smtClean="0"/>
-              <a:t>9/30/25</a:t>
+              <a:t>2/10/26</a:t>
             </a:fld>
             <a:endParaRPr lang="en-US"/>
           </a:p>
@@ -8284,7 +8284,7 @@
           <a:p>
             <a:fld id="{C05B5302-E07E-D047-B72D-5EA1F4217547}" type="datetime1">
               <a:rPr lang="en-US" smtClean="0"/>
-              <a:t>9/30/25</a:t>
+              <a:t>2/10/26</a:t>
             </a:fld>
             <a:endParaRPr lang="en-US"/>
           </a:p>
@@ -8670,7 +8670,7 @@
           <a:p>
             <a:fld id="{9B22474D-F323-6049-8BE4-C47720D4CC7A}" type="datetime1">
               <a:rPr lang="en-US" smtClean="0"/>
-              <a:t>9/30/25</a:t>
+              <a:t>2/10/26</a:t>
             </a:fld>
             <a:endParaRPr lang="en-US"/>
           </a:p>
@@ -8793,7 +8793,7 @@
           <a:p>
             <a:fld id="{948977F8-29E8-974D-B150-F756084B5AD9}" type="datetime1">
               <a:rPr lang="en-US" smtClean="0"/>
-              <a:t>9/30/25</a:t>
+              <a:t>2/10/26</a:t>
             </a:fld>
             <a:endParaRPr lang="en-US"/>
           </a:p>
@@ -8888,7 +8888,7 @@
           <a:p>
             <a:fld id="{41149670-4D20-4B4B-8EF1-7DC779D74B96}" type="datetime1">
               <a:rPr lang="en-US" smtClean="0"/>
-              <a:t>9/30/25</a:t>
+              <a:t>2/10/26</a:t>
             </a:fld>
             <a:endParaRPr lang="en-US"/>
           </a:p>
@@ -9137,7 +9137,7 @@
           <a:p>
             <a:fld id="{57FAD6C5-C717-EB4A-862C-0E6AA670F87E}" type="datetime1">
               <a:rPr lang="en-US" smtClean="0"/>
-              <a:t>9/30/25</a:t>
+              <a:t>2/10/26</a:t>
             </a:fld>
             <a:endParaRPr lang="en-US"/>
           </a:p>
@@ -9422,7 +9422,7 @@
           <a:p>
             <a:fld id="{663763E3-9B65-3242-8202-D31C08B5810D}" type="datetime1">
               <a:rPr lang="en-US" smtClean="0"/>
-              <a:t>9/30/25</a:t>
+              <a:t>2/10/26</a:t>
             </a:fld>
             <a:endParaRPr lang="en-US"/>
           </a:p>
@@ -9545,7 +9545,7 @@
           <a:noFill/>
           <a:extLst>
             <a:ext uri="{909E8E84-426E-40dd-AFC4-6F175D3DCCD1}">
-              <a14:hiddenFill xmlns:a14="http://schemas.microsoft.com/office/drawing/2010/main" xmlns="">
+              <a14:hiddenFill xmlns="" xmlns:a14="http://schemas.microsoft.com/office/drawing/2010/main">
                 <a:solidFill>
                   <a:srgbClr val="FFFFFF"/>
                 </a:solidFill>
@@ -9619,7 +9619,7 @@
               </a:ln>
               <a:extLst>
                 <a:ext uri="{91240B29-F687-4f45-9708-019B960494DF}">
-                  <a14:hiddenLine xmlns:a14="http://schemas.microsoft.com/office/drawing/2010/main" xmlns="" w="9525">
+                  <a14:hiddenLine xmlns="" xmlns:a14="http://schemas.microsoft.com/office/drawing/2010/main" w="9525">
                     <a:solidFill>
                       <a:srgbClr val="000000"/>
                     </a:solidFill>
@@ -9709,7 +9709,7 @@
               </a:ln>
               <a:extLst>
                 <a:ext uri="{91240B29-F687-4f45-9708-019B960494DF}">
-                  <a14:hiddenLine xmlns:a14="http://schemas.microsoft.com/office/drawing/2010/main" xmlns="" w="9525">
+                  <a14:hiddenLine xmlns="" xmlns:a14="http://schemas.microsoft.com/office/drawing/2010/main" w="9525">
                     <a:solidFill>
                       <a:srgbClr val="000000"/>
                     </a:solidFill>
@@ -9799,7 +9799,7 @@
               </a:ln>
               <a:extLst>
                 <a:ext uri="{91240B29-F687-4f45-9708-019B960494DF}">
-                  <a14:hiddenLine xmlns:a14="http://schemas.microsoft.com/office/drawing/2010/main" xmlns="" w="9525">
+                  <a14:hiddenLine xmlns="" xmlns:a14="http://schemas.microsoft.com/office/drawing/2010/main" w="9525">
                     <a:solidFill>
                       <a:srgbClr val="000000"/>
                     </a:solidFill>
@@ -9861,7 +9861,7 @@
               </a:ln>
               <a:extLst>
                 <a:ext uri="{91240B29-F687-4f45-9708-019B960494DF}">
-                  <a14:hiddenLine xmlns:a14="http://schemas.microsoft.com/office/drawing/2010/main" xmlns="" w="9525">
+                  <a14:hiddenLine xmlns="" xmlns:a14="http://schemas.microsoft.com/office/drawing/2010/main" w="9525">
                     <a:solidFill>
                       <a:srgbClr val="000000"/>
                     </a:solidFill>
@@ -9951,7 +9951,7 @@
               </a:ln>
               <a:extLst>
                 <a:ext uri="{91240B29-F687-4f45-9708-019B960494DF}">
-                  <a14:hiddenLine xmlns:a14="http://schemas.microsoft.com/office/drawing/2010/main" xmlns="" w="9525">
+                  <a14:hiddenLine xmlns="" xmlns:a14="http://schemas.microsoft.com/office/drawing/2010/main" w="9525">
                     <a:solidFill>
                       <a:srgbClr val="000000"/>
                     </a:solidFill>
@@ -10013,7 +10013,7 @@
               </a:ln>
               <a:extLst>
                 <a:ext uri="{91240B29-F687-4f45-9708-019B960494DF}">
-                  <a14:hiddenLine xmlns:a14="http://schemas.microsoft.com/office/drawing/2010/main" xmlns="" w="9525">
+                  <a14:hiddenLine xmlns="" xmlns:a14="http://schemas.microsoft.com/office/drawing/2010/main" w="9525">
                     <a:solidFill>
                       <a:srgbClr val="000000"/>
                     </a:solidFill>
@@ -10075,7 +10075,7 @@
               </a:ln>
               <a:extLst>
                 <a:ext uri="{91240B29-F687-4f45-9708-019B960494DF}">
-                  <a14:hiddenLine xmlns:a14="http://schemas.microsoft.com/office/drawing/2010/main" xmlns="" w="9525">
+                  <a14:hiddenLine xmlns="" xmlns:a14="http://schemas.microsoft.com/office/drawing/2010/main" w="9525">
                     <a:solidFill>
                       <a:srgbClr val="000000"/>
                     </a:solidFill>
@@ -10165,7 +10165,7 @@
               </a:ln>
               <a:extLst>
                 <a:ext uri="{91240B29-F687-4f45-9708-019B960494DF}">
-                  <a14:hiddenLine xmlns:a14="http://schemas.microsoft.com/office/drawing/2010/main" xmlns="" w="9525">
+                  <a14:hiddenLine xmlns="" xmlns:a14="http://schemas.microsoft.com/office/drawing/2010/main" w="9525">
                     <a:solidFill>
                       <a:srgbClr val="000000"/>
                     </a:solidFill>
@@ -10255,7 +10255,7 @@
               </a:ln>
               <a:extLst>
                 <a:ext uri="{91240B29-F687-4f45-9708-019B960494DF}">
-                  <a14:hiddenLine xmlns:a14="http://schemas.microsoft.com/office/drawing/2010/main" xmlns="" w="9525">
+                  <a14:hiddenLine xmlns="" xmlns:a14="http://schemas.microsoft.com/office/drawing/2010/main" w="9525">
                     <a:solidFill>
                       <a:srgbClr val="000000"/>
                     </a:solidFill>
@@ -10317,7 +10317,7 @@
               </a:ln>
               <a:extLst>
                 <a:ext uri="{91240B29-F687-4f45-9708-019B960494DF}">
-                  <a14:hiddenLine xmlns:a14="http://schemas.microsoft.com/office/drawing/2010/main" xmlns="" w="9525">
+                  <a14:hiddenLine xmlns="" xmlns:a14="http://schemas.microsoft.com/office/drawing/2010/main" w="9525">
                     <a:solidFill>
                       <a:srgbClr val="000000"/>
                     </a:solidFill>
@@ -10427,7 +10427,7 @@
               </a:ln>
               <a:extLst>
                 <a:ext uri="{91240B29-F687-4f45-9708-019B960494DF}">
-                  <a14:hiddenLine xmlns:a14="http://schemas.microsoft.com/office/drawing/2010/main" xmlns="" w="9525">
+                  <a14:hiddenLine xmlns="" xmlns:a14="http://schemas.microsoft.com/office/drawing/2010/main" w="9525">
                     <a:solidFill>
                       <a:srgbClr val="000000"/>
                     </a:solidFill>
@@ -10511,7 +10511,7 @@
               </a:ln>
               <a:extLst>
                 <a:ext uri="{91240B29-F687-4f45-9708-019B960494DF}">
-                  <a14:hiddenLine xmlns:a14="http://schemas.microsoft.com/office/drawing/2010/main" xmlns="" w="9525">
+                  <a14:hiddenLine xmlns="" xmlns:a14="http://schemas.microsoft.com/office/drawing/2010/main" w="9525">
                     <a:solidFill>
                       <a:srgbClr val="000000"/>
                     </a:solidFill>
@@ -10573,7 +10573,7 @@
               </a:ln>
               <a:extLst>
                 <a:ext uri="{91240B29-F687-4f45-9708-019B960494DF}">
-                  <a14:hiddenLine xmlns:a14="http://schemas.microsoft.com/office/drawing/2010/main" xmlns="" w="9525">
+                  <a14:hiddenLine xmlns="" xmlns:a14="http://schemas.microsoft.com/office/drawing/2010/main" w="9525">
                     <a:solidFill>
                       <a:srgbClr val="000000"/>
                     </a:solidFill>
@@ -10635,7 +10635,7 @@
               </a:ln>
               <a:extLst>
                 <a:ext uri="{91240B29-F687-4f45-9708-019B960494DF}">
-                  <a14:hiddenLine xmlns:a14="http://schemas.microsoft.com/office/drawing/2010/main" xmlns="" w="9525">
+                  <a14:hiddenLine xmlns="" xmlns:a14="http://schemas.microsoft.com/office/drawing/2010/main" w="9525">
                     <a:solidFill>
                       <a:srgbClr val="000000"/>
                     </a:solidFill>
@@ -10725,7 +10725,7 @@
               </a:ln>
               <a:extLst>
                 <a:ext uri="{91240B29-F687-4f45-9708-019B960494DF}">
-                  <a14:hiddenLine xmlns:a14="http://schemas.microsoft.com/office/drawing/2010/main" xmlns="" w="9525">
+                  <a14:hiddenLine xmlns="" xmlns:a14="http://schemas.microsoft.com/office/drawing/2010/main" w="9525">
                     <a:solidFill>
                       <a:srgbClr val="000000"/>
                     </a:solidFill>
@@ -10759,7 +10759,7 @@
               </a:ln>
               <a:extLst>
                 <a:ext uri="{91240B29-F687-4f45-9708-019B960494DF}">
-                  <a14:hiddenLine xmlns:a14="http://schemas.microsoft.com/office/drawing/2010/main" xmlns="" w="9525">
+                  <a14:hiddenLine xmlns="" xmlns:a14="http://schemas.microsoft.com/office/drawing/2010/main" w="9525">
                     <a:solidFill>
                       <a:srgbClr val="000000"/>
                     </a:solidFill>
@@ -10824,7 +10824,7 @@
               </a:ln>
               <a:extLst>
                 <a:ext uri="{91240B29-F687-4f45-9708-019B960494DF}">
-                  <a14:hiddenLine xmlns:a14="http://schemas.microsoft.com/office/drawing/2010/main" xmlns="" w="9525">
+                  <a14:hiddenLine xmlns="" xmlns:a14="http://schemas.microsoft.com/office/drawing/2010/main" w="9525">
                     <a:solidFill>
                       <a:srgbClr val="000000"/>
                     </a:solidFill>
@@ -10914,7 +10914,7 @@
               </a:ln>
               <a:extLst>
                 <a:ext uri="{91240B29-F687-4f45-9708-019B960494DF}">
-                  <a14:hiddenLine xmlns:a14="http://schemas.microsoft.com/office/drawing/2010/main" xmlns="" w="9525">
+                  <a14:hiddenLine xmlns="" xmlns:a14="http://schemas.microsoft.com/office/drawing/2010/main" w="9525">
                     <a:solidFill>
                       <a:srgbClr val="000000"/>
                     </a:solidFill>
@@ -10976,7 +10976,7 @@
               </a:ln>
               <a:extLst>
                 <a:ext uri="{91240B29-F687-4f45-9708-019B960494DF}">
-                  <a14:hiddenLine xmlns:a14="http://schemas.microsoft.com/office/drawing/2010/main" xmlns="" w="9525">
+                  <a14:hiddenLine xmlns="" xmlns:a14="http://schemas.microsoft.com/office/drawing/2010/main" w="9525">
                     <a:solidFill>
                       <a:srgbClr val="000000"/>
                     </a:solidFill>
@@ -11066,7 +11066,7 @@
               </a:ln>
               <a:extLst>
                 <a:ext uri="{91240B29-F687-4f45-9708-019B960494DF}">
-                  <a14:hiddenLine xmlns:a14="http://schemas.microsoft.com/office/drawing/2010/main" xmlns="" w="9525">
+                  <a14:hiddenLine xmlns="" xmlns:a14="http://schemas.microsoft.com/office/drawing/2010/main" w="9525">
                     <a:solidFill>
                       <a:srgbClr val="000000"/>
                     </a:solidFill>
@@ -11131,7 +11131,7 @@
               </a:ln>
               <a:extLst>
                 <a:ext uri="{91240B29-F687-4f45-9708-019B960494DF}">
-                  <a14:hiddenLine xmlns:a14="http://schemas.microsoft.com/office/drawing/2010/main" xmlns="" w="9525">
+                  <a14:hiddenLine xmlns="" xmlns:a14="http://schemas.microsoft.com/office/drawing/2010/main" w="9525">
                     <a:solidFill>
                       <a:srgbClr val="000000"/>
                     </a:solidFill>
@@ -11193,7 +11193,7 @@
               </a:ln>
               <a:extLst>
                 <a:ext uri="{91240B29-F687-4f45-9708-019B960494DF}">
-                  <a14:hiddenLine xmlns:a14="http://schemas.microsoft.com/office/drawing/2010/main" xmlns="" w="9525">
+                  <a14:hiddenLine xmlns="" xmlns:a14="http://schemas.microsoft.com/office/drawing/2010/main" w="9525">
                     <a:solidFill>
                       <a:srgbClr val="000000"/>
                     </a:solidFill>
@@ -11283,7 +11283,7 @@
               </a:ln>
               <a:extLst>
                 <a:ext uri="{91240B29-F687-4f45-9708-019B960494DF}">
-                  <a14:hiddenLine xmlns:a14="http://schemas.microsoft.com/office/drawing/2010/main" xmlns="" w="9525">
+                  <a14:hiddenLine xmlns="" xmlns:a14="http://schemas.microsoft.com/office/drawing/2010/main" w="9525">
                     <a:solidFill>
                       <a:srgbClr val="000000"/>
                     </a:solidFill>
@@ -11373,7 +11373,7 @@
               </a:ln>
               <a:extLst>
                 <a:ext uri="{91240B29-F687-4f45-9708-019B960494DF}">
-                  <a14:hiddenLine xmlns:a14="http://schemas.microsoft.com/office/drawing/2010/main" xmlns="" w="9525">
+                  <a14:hiddenLine xmlns="" xmlns:a14="http://schemas.microsoft.com/office/drawing/2010/main" w="9525">
                     <a:solidFill>
                       <a:srgbClr val="000000"/>
                     </a:solidFill>
@@ -11438,7 +11438,7 @@
               </a:ln>
               <a:extLst>
                 <a:ext uri="{91240B29-F687-4f45-9708-019B960494DF}">
-                  <a14:hiddenLine xmlns:a14="http://schemas.microsoft.com/office/drawing/2010/main" xmlns="" w="9525">
+                  <a14:hiddenLine xmlns="" xmlns:a14="http://schemas.microsoft.com/office/drawing/2010/main" w="9525">
                     <a:solidFill>
                       <a:srgbClr val="000000"/>
                     </a:solidFill>
@@ -11558,7 +11558,7 @@
               </a:ln>
               <a:extLst>
                 <a:ext uri="{91240B29-F687-4f45-9708-019B960494DF}">
-                  <a14:hiddenLine xmlns:a14="http://schemas.microsoft.com/office/drawing/2010/main" xmlns="" w="9525">
+                  <a14:hiddenLine xmlns="" xmlns:a14="http://schemas.microsoft.com/office/drawing/2010/main" w="9525">
                     <a:solidFill>
                       <a:srgbClr val="000000"/>
                     </a:solidFill>
@@ -11639,7 +11639,7 @@
               </a:ln>
               <a:extLst>
                 <a:ext uri="{91240B29-F687-4f45-9708-019B960494DF}">
-                  <a14:hiddenLine xmlns:a14="http://schemas.microsoft.com/office/drawing/2010/main" xmlns="" w="9525">
+                  <a14:hiddenLine xmlns="" xmlns:a14="http://schemas.microsoft.com/office/drawing/2010/main" w="9525">
                     <a:solidFill>
                       <a:srgbClr val="000000"/>
                     </a:solidFill>
@@ -11754,7 +11754,7 @@
               </a:ln>
               <a:extLst>
                 <a:ext uri="{91240B29-F687-4f45-9708-019B960494DF}">
-                  <a14:hiddenLine xmlns:a14="http://schemas.microsoft.com/office/drawing/2010/main" xmlns="" w="9525">
+                  <a14:hiddenLine xmlns="" xmlns:a14="http://schemas.microsoft.com/office/drawing/2010/main" w="9525">
                     <a:solidFill>
                       <a:srgbClr val="000000"/>
                     </a:solidFill>
@@ -11844,7 +11844,7 @@
               </a:ln>
               <a:extLst>
                 <a:ext uri="{91240B29-F687-4f45-9708-019B960494DF}">
-                  <a14:hiddenLine xmlns:a14="http://schemas.microsoft.com/office/drawing/2010/main" xmlns="" w="9525">
+                  <a14:hiddenLine xmlns="" xmlns:a14="http://schemas.microsoft.com/office/drawing/2010/main" w="9525">
                     <a:solidFill>
                       <a:srgbClr val="000000"/>
                     </a:solidFill>
@@ -11909,7 +11909,7 @@
               </a:ln>
               <a:extLst>
                 <a:ext uri="{91240B29-F687-4f45-9708-019B960494DF}">
-                  <a14:hiddenLine xmlns:a14="http://schemas.microsoft.com/office/drawing/2010/main" xmlns="" w="9525">
+                  <a14:hiddenLine xmlns="" xmlns:a14="http://schemas.microsoft.com/office/drawing/2010/main" w="9525">
                     <a:solidFill>
                       <a:srgbClr val="000000"/>
                     </a:solidFill>
@@ -11999,7 +11999,7 @@
               </a:ln>
               <a:extLst>
                 <a:ext uri="{91240B29-F687-4f45-9708-019B960494DF}">
-                  <a14:hiddenLine xmlns:a14="http://schemas.microsoft.com/office/drawing/2010/main" xmlns="" w="9525">
+                  <a14:hiddenLine xmlns="" xmlns:a14="http://schemas.microsoft.com/office/drawing/2010/main" w="9525">
                     <a:solidFill>
                       <a:srgbClr val="000000"/>
                     </a:solidFill>
@@ -12067,7 +12067,7 @@
               </a:ln>
               <a:extLst>
                 <a:ext uri="{91240B29-F687-4f45-9708-019B960494DF}">
-                  <a14:hiddenLine xmlns:a14="http://schemas.microsoft.com/office/drawing/2010/main" xmlns="" w="9525">
+                  <a14:hiddenLine xmlns="" xmlns:a14="http://schemas.microsoft.com/office/drawing/2010/main" w="9525">
                     <a:solidFill>
                       <a:srgbClr val="000000"/>
                     </a:solidFill>
@@ -12157,7 +12157,7 @@
               </a:ln>
               <a:extLst>
                 <a:ext uri="{91240B29-F687-4f45-9708-019B960494DF}">
-                  <a14:hiddenLine xmlns:a14="http://schemas.microsoft.com/office/drawing/2010/main" xmlns="" w="9525">
+                  <a14:hiddenLine xmlns="" xmlns:a14="http://schemas.microsoft.com/office/drawing/2010/main" w="9525">
                     <a:solidFill>
                       <a:srgbClr val="000000"/>
                     </a:solidFill>
@@ -12225,7 +12225,7 @@
               </a:ln>
               <a:extLst>
                 <a:ext uri="{91240B29-F687-4f45-9708-019B960494DF}">
-                  <a14:hiddenLine xmlns:a14="http://schemas.microsoft.com/office/drawing/2010/main" xmlns="" w="9525">
+                  <a14:hiddenLine xmlns="" xmlns:a14="http://schemas.microsoft.com/office/drawing/2010/main" w="9525">
                     <a:solidFill>
                       <a:srgbClr val="000000"/>
                     </a:solidFill>
@@ -12315,7 +12315,7 @@
               </a:ln>
               <a:extLst>
                 <a:ext uri="{91240B29-F687-4f45-9708-019B960494DF}">
-                  <a14:hiddenLine xmlns:a14="http://schemas.microsoft.com/office/drawing/2010/main" xmlns="" w="9525">
+                  <a14:hiddenLine xmlns="" xmlns:a14="http://schemas.microsoft.com/office/drawing/2010/main" w="9525">
                     <a:solidFill>
                       <a:srgbClr val="000000"/>
                     </a:solidFill>
@@ -12349,7 +12349,7 @@
               </a:ln>
               <a:extLst>
                 <a:ext uri="{91240B29-F687-4f45-9708-019B960494DF}">
-                  <a14:hiddenLine xmlns:a14="http://schemas.microsoft.com/office/drawing/2010/main" xmlns="" w="9525">
+                  <a14:hiddenLine xmlns="" xmlns:a14="http://schemas.microsoft.com/office/drawing/2010/main" w="9525">
                     <a:solidFill>
                       <a:srgbClr val="000000"/>
                     </a:solidFill>
@@ -12489,7 +12489,7 @@
           <a:p>
             <a:fld id="{E037DA36-6533-3A4A-B84C-ACD42B52C5B4}" type="datetime1">
               <a:rPr lang="en-US" smtClean="0"/>
-              <a:t>9/30/25</a:t>
+              <a:t>2/10/26</a:t>
             </a:fld>
             <a:endParaRPr lang="en-US"/>
           </a:p>
@@ -20550,8 +20550,8 @@
           </a:p>
         </p:txBody>
       </p:sp>
-      <mc:AlternateContent xmlns:mc="http://schemas.openxmlformats.org/markup-compatibility/2006">
-        <mc:Choice xmlns:a14="http://schemas.microsoft.com/office/drawing/2010/main" Requires="a14">
+      <mc:AlternateContent xmlns:mc="http://schemas.openxmlformats.org/markup-compatibility/2006" xmlns:a14="http://schemas.microsoft.com/office/drawing/2010/main">
+        <mc:Choice Requires="a14">
           <p:sp>
             <p:nvSpPr>
               <p:cNvPr id="9" name="TextBox 8">
@@ -20711,7 +20711,7 @@
             </p:txBody>
           </p:sp>
         </mc:Choice>
-        <mc:Fallback>
+        <mc:Fallback xmlns="">
           <p:sp>
             <p:nvSpPr>
               <p:cNvPr id="9" name="TextBox 8">
@@ -33380,8 +33380,8 @@
           </p:sp>
         </mc:Fallback>
       </mc:AlternateContent>
-      <mc:AlternateContent xmlns:mc="http://schemas.openxmlformats.org/markup-compatibility/2006">
-        <mc:Choice xmlns:a14="http://schemas.microsoft.com/office/drawing/2010/main" Requires="a14">
+      <mc:AlternateContent xmlns:mc="http://schemas.openxmlformats.org/markup-compatibility/2006" xmlns:a14="http://schemas.microsoft.com/office/drawing/2010/main">
+        <mc:Choice Requires="a14">
           <p:sp>
             <p:nvSpPr>
               <p:cNvPr id="11" name="TextBox 10">
@@ -33464,7 +33464,7 @@
             </p:txBody>
           </p:sp>
         </mc:Choice>
-        <mc:Fallback>
+        <mc:Fallback xmlns="">
           <p:sp>
             <p:nvSpPr>
               <p:cNvPr id="11" name="TextBox 10">
@@ -33509,8 +33509,8 @@
           </p:sp>
         </mc:Fallback>
       </mc:AlternateContent>
-      <mc:AlternateContent xmlns:mc="http://schemas.openxmlformats.org/markup-compatibility/2006">
-        <mc:Choice xmlns:a14="http://schemas.microsoft.com/office/drawing/2010/main" Requires="a14">
+      <mc:AlternateContent xmlns:mc="http://schemas.openxmlformats.org/markup-compatibility/2006" xmlns:a14="http://schemas.microsoft.com/office/drawing/2010/main">
+        <mc:Choice Requires="a14">
           <p:sp>
             <p:nvSpPr>
               <p:cNvPr id="13" name="TextBox 12">
@@ -33593,7 +33593,7 @@
             </p:txBody>
           </p:sp>
         </mc:Choice>
-        <mc:Fallback>
+        <mc:Fallback xmlns="">
           <p:sp>
             <p:nvSpPr>
               <p:cNvPr id="13" name="TextBox 12">
@@ -34463,8 +34463,8 @@
           </p:sp>
         </mc:Fallback>
       </mc:AlternateContent>
-      <mc:AlternateContent xmlns:mc="http://schemas.openxmlformats.org/markup-compatibility/2006">
-        <mc:Choice xmlns:a14="http://schemas.microsoft.com/office/drawing/2010/main" Requires="a14">
+      <mc:AlternateContent xmlns:mc="http://schemas.openxmlformats.org/markup-compatibility/2006" xmlns:a14="http://schemas.microsoft.com/office/drawing/2010/main">
+        <mc:Choice Requires="a14">
           <p:sp>
             <p:nvSpPr>
               <p:cNvPr id="20" name="TextBox 19">
@@ -34645,7 +34645,7 @@
             </p:txBody>
           </p:sp>
         </mc:Choice>
-        <mc:Fallback>
+        <mc:Fallback xmlns="">
           <p:sp>
             <p:nvSpPr>
               <p:cNvPr id="20" name="TextBox 19">
@@ -34690,8 +34690,8 @@
           </p:sp>
         </mc:Fallback>
       </mc:AlternateContent>
-      <mc:AlternateContent xmlns:mc="http://schemas.openxmlformats.org/markup-compatibility/2006">
-        <mc:Choice xmlns:a14="http://schemas.microsoft.com/office/drawing/2010/main" Requires="a14">
+      <mc:AlternateContent xmlns:mc="http://schemas.openxmlformats.org/markup-compatibility/2006" xmlns:a14="http://schemas.microsoft.com/office/drawing/2010/main">
+        <mc:Choice Requires="a14">
           <p:sp>
             <p:nvSpPr>
               <p:cNvPr id="3" name="TextBox 2">
@@ -34774,7 +34774,7 @@
             </p:txBody>
           </p:sp>
         </mc:Choice>
-        <mc:Fallback>
+        <mc:Fallback xmlns="">
           <p:sp>
             <p:nvSpPr>
               <p:cNvPr id="3" name="TextBox 2">
